--- a/CalendarioAgo2026/presentaciones/8_For.pptx
+++ b/CalendarioAgo2026/presentaciones/8_For.pptx
@@ -147,6 +147,35 @@
 </p:presentation>
 </file>
 
+<file path=ppt/changesInfos/changesInfo1.xml><?xml version="1.0" encoding="utf-8"?>
+<pc:chgInfo xmlns:a="http://schemas.openxmlformats.org/drawingml/2006/main" xmlns:r="http://schemas.openxmlformats.org/officeDocument/2006/relationships" xmlns:ac="http://schemas.microsoft.com/office/drawing/2013/main/command" xmlns:pc="http://schemas.microsoft.com/office/powerpoint/2013/main/command">
+  <pc:docChgLst>
+    <pc:chgData name="Lizethe Pérez Fuertes" userId="4ae9ef87-2a7d-42f8-8dfa-0a501a9e2ff4" providerId="ADAL" clId="{FDDD45CB-1330-4033-A842-3D2746AFF7C7}"/>
+    <pc:docChg chg="custSel modSld">
+      <pc:chgData name="Lizethe Pérez Fuertes" userId="4ae9ef87-2a7d-42f8-8dfa-0a501a9e2ff4" providerId="ADAL" clId="{FDDD45CB-1330-4033-A842-3D2746AFF7C7}" dt="2026-08-07T00:49:11.908" v="17" actId="27636"/>
+      <pc:docMkLst>
+        <pc:docMk/>
+      </pc:docMkLst>
+      <pc:sldChg chg="modSp mod">
+        <pc:chgData name="Lizethe Pérez Fuertes" userId="4ae9ef87-2a7d-42f8-8dfa-0a501a9e2ff4" providerId="ADAL" clId="{FDDD45CB-1330-4033-A842-3D2746AFF7C7}" dt="2026-08-07T00:49:11.908" v="17" actId="27636"/>
+        <pc:sldMkLst>
+          <pc:docMk/>
+          <pc:sldMk cId="2553855534" sldId="289"/>
+        </pc:sldMkLst>
+        <pc:spChg chg="mod">
+          <ac:chgData name="Lizethe Pérez Fuertes" userId="4ae9ef87-2a7d-42f8-8dfa-0a501a9e2ff4" providerId="ADAL" clId="{FDDD45CB-1330-4033-A842-3D2746AFF7C7}" dt="2026-08-07T00:49:11.908" v="17" actId="27636"/>
+          <ac:spMkLst>
+            <pc:docMk/>
+            <pc:sldMk cId="2553855534" sldId="289"/>
+            <ac:spMk id="2" creationId="{00000000-0000-0000-0000-000000000000}"/>
+          </ac:spMkLst>
+        </pc:spChg>
+      </pc:sldChg>
+    </pc:docChg>
+  </pc:docChgLst>
+</pc:chgInfo>
+</file>
+
 <file path=ppt/notesMasters/notesMaster1.xml><?xml version="1.0" encoding="utf-8"?>
 <p:notesMaster xmlns:a="http://schemas.openxmlformats.org/drawingml/2006/main" xmlns:r="http://schemas.openxmlformats.org/officeDocument/2006/relationships" xmlns:p="http://schemas.openxmlformats.org/presentationml/2006/main">
   <p:cSld>
@@ -229,7 +258,7 @@
           <a:p>
             <a:fld id="{6850521A-C27A-4838-9C91-787748A77EFD}" type="datetimeFigureOut">
               <a:rPr lang="es-MX" smtClean="0"/>
-              <a:t>29/08/2023</a:t>
+              <a:t>06/08/2026</a:t>
             </a:fld>
             <a:endParaRPr lang="es-MX" dirty="0"/>
           </a:p>
@@ -2022,7 +2051,7 @@
           <a:p>
             <a:fld id="{25BC5239-EFEC-4EF5-AB4E-B8ED16D8832D}" type="datetimeFigureOut">
               <a:rPr lang="es-MX" smtClean="0"/>
-              <a:t>29/08/2023</a:t>
+              <a:t>06/08/2026</a:t>
             </a:fld>
             <a:endParaRPr lang="es-MX" dirty="0"/>
           </a:p>
@@ -2192,7 +2221,7 @@
           <a:p>
             <a:fld id="{25BC5239-EFEC-4EF5-AB4E-B8ED16D8832D}" type="datetimeFigureOut">
               <a:rPr lang="es-MX" smtClean="0"/>
-              <a:t>29/08/2023</a:t>
+              <a:t>06/08/2026</a:t>
             </a:fld>
             <a:endParaRPr lang="es-MX" dirty="0"/>
           </a:p>
@@ -2372,7 +2401,7 @@
           <a:p>
             <a:fld id="{25BC5239-EFEC-4EF5-AB4E-B8ED16D8832D}" type="datetimeFigureOut">
               <a:rPr lang="es-MX" smtClean="0"/>
-              <a:t>29/08/2023</a:t>
+              <a:t>06/08/2026</a:t>
             </a:fld>
             <a:endParaRPr lang="es-MX" dirty="0"/>
           </a:p>
@@ -2753,7 +2782,7 @@
           <a:p>
             <a:fld id="{1D8BD707-D9CF-40AE-B4C6-C98DA3205C09}" type="datetimeFigureOut">
               <a:rPr lang="en-US" smtClean="0"/>
-              <a:t>8/29/2023</a:t>
+              <a:t>8/6/2026</a:t>
             </a:fld>
             <a:endParaRPr lang="en-US" dirty="0"/>
           </a:p>
@@ -2913,7 +2942,7 @@
           <a:p>
             <a:fld id="{25BC5239-EFEC-4EF5-AB4E-B8ED16D8832D}" type="datetimeFigureOut">
               <a:rPr lang="es-MX" smtClean="0"/>
-              <a:t>29/08/2023</a:t>
+              <a:t>06/08/2026</a:t>
             </a:fld>
             <a:endParaRPr lang="es-MX" dirty="0"/>
           </a:p>
@@ -3159,7 +3188,7 @@
           <a:p>
             <a:fld id="{25BC5239-EFEC-4EF5-AB4E-B8ED16D8832D}" type="datetimeFigureOut">
               <a:rPr lang="es-MX" smtClean="0"/>
-              <a:t>29/08/2023</a:t>
+              <a:t>06/08/2026</a:t>
             </a:fld>
             <a:endParaRPr lang="es-MX" dirty="0"/>
           </a:p>
@@ -3447,7 +3476,7 @@
           <a:p>
             <a:fld id="{25BC5239-EFEC-4EF5-AB4E-B8ED16D8832D}" type="datetimeFigureOut">
               <a:rPr lang="es-MX" smtClean="0"/>
-              <a:t>29/08/2023</a:t>
+              <a:t>06/08/2026</a:t>
             </a:fld>
             <a:endParaRPr lang="es-MX" dirty="0"/>
           </a:p>
@@ -3869,7 +3898,7 @@
           <a:p>
             <a:fld id="{25BC5239-EFEC-4EF5-AB4E-B8ED16D8832D}" type="datetimeFigureOut">
               <a:rPr lang="es-MX" smtClean="0"/>
-              <a:t>29/08/2023</a:t>
+              <a:t>06/08/2026</a:t>
             </a:fld>
             <a:endParaRPr lang="es-MX" dirty="0"/>
           </a:p>
@@ -3987,7 +4016,7 @@
           <a:p>
             <a:fld id="{25BC5239-EFEC-4EF5-AB4E-B8ED16D8832D}" type="datetimeFigureOut">
               <a:rPr lang="es-MX" smtClean="0"/>
-              <a:t>29/08/2023</a:t>
+              <a:t>06/08/2026</a:t>
             </a:fld>
             <a:endParaRPr lang="es-MX" dirty="0"/>
           </a:p>
@@ -4082,7 +4111,7 @@
           <a:p>
             <a:fld id="{25BC5239-EFEC-4EF5-AB4E-B8ED16D8832D}" type="datetimeFigureOut">
               <a:rPr lang="es-MX" smtClean="0"/>
-              <a:t>29/08/2023</a:t>
+              <a:t>06/08/2026</a:t>
             </a:fld>
             <a:endParaRPr lang="es-MX" dirty="0"/>
           </a:p>
@@ -4359,7 +4388,7 @@
           <a:p>
             <a:fld id="{25BC5239-EFEC-4EF5-AB4E-B8ED16D8832D}" type="datetimeFigureOut">
               <a:rPr lang="es-MX" smtClean="0"/>
-              <a:t>29/08/2023</a:t>
+              <a:t>06/08/2026</a:t>
             </a:fld>
             <a:endParaRPr lang="es-MX" dirty="0"/>
           </a:p>
@@ -4612,7 +4641,7 @@
           <a:p>
             <a:fld id="{25BC5239-EFEC-4EF5-AB4E-B8ED16D8832D}" type="datetimeFigureOut">
               <a:rPr lang="es-MX" smtClean="0"/>
-              <a:t>29/08/2023</a:t>
+              <a:t>06/08/2026</a:t>
             </a:fld>
             <a:endParaRPr lang="es-MX" dirty="0"/>
           </a:p>
@@ -4825,7 +4854,7 @@
           <a:p>
             <a:fld id="{25BC5239-EFEC-4EF5-AB4E-B8ED16D8832D}" type="datetimeFigureOut">
               <a:rPr lang="es-MX" smtClean="0"/>
-              <a:t>29/08/2023</a:t>
+              <a:t>06/08/2026</a:t>
             </a:fld>
             <a:endParaRPr lang="es-MX" dirty="0"/>
           </a:p>
@@ -5220,7 +5249,7 @@
         </p:spPr>
         <p:txBody>
           <a:bodyPr rtlCol="0">
-            <a:normAutofit fontScale="90000"/>
+            <a:normAutofit/>
           </a:bodyPr>
           <a:lstStyle/>
           <a:p>
@@ -5238,7 +5267,7 @@
                   </a:schemeClr>
                 </a:solidFill>
               </a:rPr>
-              <a:t>TC1028 </a:t>
+              <a:t>TC 1037 </a:t>
             </a:r>
             <a:br>
               <a:rPr lang="es-MX" sz="3200" dirty="0">
@@ -5257,7 +5286,7 @@
                   </a:schemeClr>
                 </a:solidFill>
               </a:rPr>
-              <a:t>Pensamiento Computacional para Ingeniería</a:t>
+              <a:t>Pensamiento algorítmico</a:t>
             </a:r>
           </a:p>
         </p:txBody>
